--- a/public/documents/business-simulation/round-4/section-c/section-c-round4-u1-vs-u2-insights-debrief.pptx
+++ b/public/documents/business-simulation/round-4/section-c/section-c-round4-u1-vs-u2-insights-debrief.pptx
@@ -494,6 +494,10 @@
           </p:nvPr>
         </p:nvSpPr>
         <p:spPr/>
+        <p:txBody>
+          <a:bodyPr/>
+          <a:p/>
+        </p:txBody>
       </p:sp>
       <p:sp>
         <p:nvSpPr>
@@ -510,10 +514,6 @@
           <a:bodyPr/>
           <a:lstStyle/>
           <a:p>
-            <a:r>
-              <a:rPr lang="en-US" dirty="0"/>
-              <a:t>Set up cross-universe comparison carefully. Teams are not in the same competitive market, so compare patterns rather than create a combined ranking.</a:t>
-            </a:r>
             <a:endParaRPr lang="en-US" dirty="0"/>
           </a:p>
         </p:txBody>
@@ -533,10 +533,6 @@
           <a:bodyPr/>
           <a:lstStyle/>
           <a:p>
-            <a:fld id="{F7021451-1387-4CA6-816F-3879F97B5CBC}" type="slidenum">
-              <a:rPr lang="en-US"/>
-              <a:t>1</a:t>
-            </a:fld>
             <a:endParaRPr lang="en-US"/>
           </a:p>
         </p:txBody>
@@ -582,6 +578,10 @@
           </p:nvPr>
         </p:nvSpPr>
         <p:spPr/>
+        <p:txBody>
+          <a:bodyPr/>
+          <a:p/>
+        </p:txBody>
       </p:sp>
       <p:sp>
         <p:nvSpPr>
@@ -598,10 +598,6 @@
           <a:bodyPr/>
           <a:lstStyle/>
           <a:p>
-            <a:r>
-              <a:rPr lang="en-US" dirty="0"/>
-              <a:t>This can be used as a class-wide discussion slide.</a:t>
-            </a:r>
             <a:endParaRPr lang="en-US" dirty="0"/>
           </a:p>
         </p:txBody>
@@ -621,10 +617,6 @@
           <a:bodyPr/>
           <a:lstStyle/>
           <a:p>
-            <a:fld id="{F7021451-1387-4CA6-816F-3879F97B5CBC}" type="slidenum">
-              <a:rPr lang="en-US"/>
-              <a:t>10</a:t>
-            </a:fld>
             <a:endParaRPr lang="en-US"/>
           </a:p>
         </p:txBody>
@@ -670,6 +662,10 @@
           </p:nvPr>
         </p:nvSpPr>
         <p:spPr/>
+        <p:txBody>
+          <a:bodyPr/>
+          <a:p/>
+        </p:txBody>
       </p:sp>
       <p:sp>
         <p:nvSpPr>
@@ -686,10 +682,6 @@
           <a:bodyPr/>
           <a:lstStyle/>
           <a:p>
-            <a:r>
-              <a:rPr lang="en-US" dirty="0"/>
-              <a:t>Close the cross-universe deck with a decision-discipline message.</a:t>
-            </a:r>
             <a:endParaRPr lang="en-US" dirty="0"/>
           </a:p>
         </p:txBody>
@@ -709,10 +701,6 @@
           <a:bodyPr/>
           <a:lstStyle/>
           <a:p>
-            <a:fld id="{F7021451-1387-4CA6-816F-3879F97B5CBC}" type="slidenum">
-              <a:rPr lang="en-US"/>
-              <a:t>11</a:t>
-            </a:fld>
             <a:endParaRPr lang="en-US"/>
           </a:p>
         </p:txBody>
@@ -758,6 +746,10 @@
           </p:nvPr>
         </p:nvSpPr>
         <p:spPr/>
+        <p:txBody>
+          <a:bodyPr/>
+          <a:p/>
+        </p:txBody>
       </p:sp>
       <p:sp>
         <p:nvSpPr>
@@ -774,10 +766,6 @@
           <a:bodyPr/>
           <a:lstStyle/>
           <a:p>
-            <a:r>
-              <a:rPr lang="en-US" dirty="0"/>
-              <a:t>Clarify that the comparison is not a cross-market leaderboard. It is a teaching comparison of strategic systems.</a:t>
-            </a:r>
             <a:endParaRPr lang="en-US" dirty="0"/>
           </a:p>
         </p:txBody>
@@ -797,10 +785,6 @@
           <a:bodyPr/>
           <a:lstStyle/>
           <a:p>
-            <a:fld id="{F7021451-1387-4CA6-816F-3879F97B5CBC}" type="slidenum">
-              <a:rPr lang="en-US"/>
-              <a:t>2</a:t>
-            </a:fld>
             <a:endParaRPr lang="en-US"/>
           </a:p>
         </p:txBody>
@@ -846,6 +830,10 @@
           </p:nvPr>
         </p:nvSpPr>
         <p:spPr/>
+        <p:txBody>
+          <a:bodyPr/>
+          <a:p/>
+        </p:txBody>
       </p:sp>
       <p:sp>
         <p:nvSpPr>
@@ -862,10 +850,6 @@
           <a:bodyPr/>
           <a:lstStyle/>
           <a:p>
-            <a:r>
-              <a:rPr lang="en-US" dirty="0"/>
-              <a:t>Universe 2 has less aggregate sales than U1 but much stronger aggregate profit and market cap. This is a core teaching contrast.</a:t>
-            </a:r>
             <a:endParaRPr lang="en-US" dirty="0"/>
           </a:p>
         </p:txBody>
@@ -885,10 +869,6 @@
           <a:bodyPr/>
           <a:lstStyle/>
           <a:p>
-            <a:fld id="{F7021451-1387-4CA6-816F-3879F97B5CBC}" type="slidenum">
-              <a:rPr lang="en-US"/>
-              <a:t>3</a:t>
-            </a:fld>
             <a:endParaRPr lang="en-US"/>
           </a:p>
         </p:txBody>
@@ -934,6 +914,10 @@
           </p:nvPr>
         </p:nvSpPr>
         <p:spPr/>
+        <p:txBody>
+          <a:bodyPr/>
+          <a:p/>
+        </p:txBody>
       </p:sp>
       <p:sp>
         <p:nvSpPr>
@@ -950,10 +934,6 @@
           <a:bodyPr/>
           <a:lstStyle/>
           <a:p>
-            <a:r>
-              <a:rPr lang="en-US" dirty="0"/>
-              <a:t>Compare the shapes of the distributions. U1 has compressed and negative TSR outcomes; U2 retains a stronger leader.</a:t>
-            </a:r>
             <a:endParaRPr lang="en-US" dirty="0"/>
           </a:p>
         </p:txBody>
@@ -973,10 +953,6 @@
           <a:bodyPr/>
           <a:lstStyle/>
           <a:p>
-            <a:fld id="{F7021451-1387-4CA6-816F-3879F97B5CBC}" type="slidenum">
-              <a:rPr lang="en-US"/>
-              <a:t>4</a:t>
-            </a:fld>
             <a:endParaRPr lang="en-US"/>
           </a:p>
         </p:txBody>
@@ -1022,6 +998,10 @@
           </p:nvPr>
         </p:nvSpPr>
         <p:spPr/>
+        <p:txBody>
+          <a:bodyPr/>
+          <a:p/>
+        </p:txBody>
       </p:sp>
       <p:sp>
         <p:nvSpPr>
@@ -1038,10 +1018,6 @@
           <a:bodyPr/>
           <a:lstStyle/>
           <a:p>
-            <a:r>
-              <a:rPr lang="en-US" dirty="0"/>
-              <a:t>Use this as a scatter discussion: scale on the x-axis, economics on the y-axis.</a:t>
-            </a:r>
             <a:endParaRPr lang="en-US" dirty="0"/>
           </a:p>
         </p:txBody>
@@ -1061,10 +1037,6 @@
           <a:bodyPr/>
           <a:lstStyle/>
           <a:p>
-            <a:fld id="{F7021451-1387-4CA6-816F-3879F97B5CBC}" type="slidenum">
-              <a:rPr lang="en-US"/>
-              <a:t>5</a:t>
-            </a:fld>
             <a:endParaRPr lang="en-US"/>
           </a:p>
         </p:txBody>
@@ -1110,6 +1082,10 @@
           </p:nvPr>
         </p:nvSpPr>
         <p:spPr/>
+        <p:txBody>
+          <a:bodyPr/>
+          <a:p/>
+        </p:txBody>
       </p:sp>
       <p:sp>
         <p:nvSpPr>
@@ -1126,10 +1102,6 @@
           <a:bodyPr/>
           <a:lstStyle/>
           <a:p>
-            <a:r>
-              <a:rPr lang="en-US" dirty="0"/>
-              <a:t>This slide frames option discipline and working capital.</a:t>
-            </a:r>
             <a:endParaRPr lang="en-US" dirty="0"/>
           </a:p>
         </p:txBody>
@@ -1149,10 +1121,6 @@
           <a:bodyPr/>
           <a:lstStyle/>
           <a:p>
-            <a:fld id="{F7021451-1387-4CA6-816F-3879F97B5CBC}" type="slidenum">
-              <a:rPr lang="en-US"/>
-              <a:t>6</a:t>
-            </a:fld>
             <a:endParaRPr lang="en-US"/>
           </a:p>
         </p:txBody>
@@ -1198,6 +1166,10 @@
           </p:nvPr>
         </p:nvSpPr>
         <p:spPr/>
+        <p:txBody>
+          <a:bodyPr/>
+          <a:p/>
+        </p:txBody>
       </p:sp>
       <p:sp>
         <p:nvSpPr>
@@ -1214,10 +1186,6 @@
           <a:bodyPr/>
           <a:lstStyle/>
           <a:p>
-            <a:r>
-              <a:rPr lang="en-US" dirty="0"/>
-              <a:t>Use this to connect operational decisions to valuation.</a:t>
-            </a:r>
             <a:endParaRPr lang="en-US" dirty="0"/>
           </a:p>
         </p:txBody>
@@ -1237,10 +1205,6 @@
           <a:bodyPr/>
           <a:lstStyle/>
           <a:p>
-            <a:fld id="{F7021451-1387-4CA6-816F-3879F97B5CBC}" type="slidenum">
-              <a:rPr lang="en-US"/>
-              <a:t>7</a:t>
-            </a:fld>
             <a:endParaRPr lang="en-US"/>
           </a:p>
         </p:txBody>
@@ -1286,6 +1250,10 @@
           </p:nvPr>
         </p:nvSpPr>
         <p:spPr/>
+        <p:txBody>
+          <a:bodyPr/>
+          <a:p/>
+        </p:txBody>
       </p:sp>
       <p:sp>
         <p:nvSpPr>
@@ -1302,10 +1270,6 @@
           <a:bodyPr/>
           <a:lstStyle/>
           <a:p>
-            <a:r>
-              <a:rPr lang="en-US" dirty="0"/>
-              <a:t>Make this constructive. U1 has teams with recovery potential, but it must repair credibility.</a:t>
-            </a:r>
             <a:endParaRPr lang="en-US" dirty="0"/>
           </a:p>
         </p:txBody>
@@ -1325,10 +1289,6 @@
           <a:bodyPr/>
           <a:lstStyle/>
           <a:p>
-            <a:fld id="{F7021451-1387-4CA6-816F-3879F97B5CBC}" type="slidenum">
-              <a:rPr lang="en-US"/>
-              <a:t>8</a:t>
-            </a:fld>
             <a:endParaRPr lang="en-US"/>
           </a:p>
         </p:txBody>
@@ -1374,6 +1334,10 @@
           </p:nvPr>
         </p:nvSpPr>
         <p:spPr/>
+        <p:txBody>
+          <a:bodyPr/>
+          <a:p/>
+        </p:txBody>
       </p:sp>
       <p:sp>
         <p:nvSpPr>
@@ -1390,10 +1354,6 @@
           <a:bodyPr/>
           <a:lstStyle/>
           <a:p>
-            <a:r>
-              <a:rPr lang="en-US" dirty="0"/>
-              <a:t>Challenge U2 by showing that strong aggregate value does not mean every team is safe.</a:t>
-            </a:r>
             <a:endParaRPr lang="en-US" dirty="0"/>
           </a:p>
         </p:txBody>
@@ -1413,10 +1373,6 @@
           <a:bodyPr/>
           <a:lstStyle/>
           <a:p>
-            <a:fld id="{F7021451-1387-4CA6-816F-3879F97B5CBC}" type="slidenum">
-              <a:rPr lang="en-US"/>
-              <a:t>9</a:t>
-            </a:fld>
             <a:endParaRPr lang="en-US"/>
           </a:p>
         </p:txBody>
@@ -1917,6 +1873,10 @@
             <a:prstDash val="solid"/>
           </a:ln>
         </p:spPr>
+        <p:txBody>
+          <a:bodyPr/>
+          <a:p/>
+        </p:txBody>
       </p:sp>
       <p:sp>
         <p:nvSpPr>
@@ -2199,6 +2159,10 @@
             <a:prstDash val="solid"/>
           </a:ln>
         </p:spPr>
+        <p:txBody>
+          <a:bodyPr/>
+          <a:p/>
+        </p:txBody>
       </p:sp>
       <p:sp>
         <p:nvSpPr>
@@ -2302,6 +2266,10 @@
             <a:prstDash val="solid"/>
           </a:ln>
         </p:spPr>
+        <p:txBody>
+          <a:bodyPr/>
+          <a:p/>
+        </p:txBody>
       </p:sp>
       <p:sp>
         <p:nvSpPr>
@@ -2368,6 +2336,10 @@
             <a:prstDash val="solid"/>
           </a:ln>
         </p:spPr>
+        <p:txBody>
+          <a:bodyPr/>
+          <a:p/>
+        </p:txBody>
       </p:sp>
       <p:sp>
         <p:nvSpPr>
@@ -2434,6 +2406,10 @@
             <a:prstDash val="solid"/>
           </a:ln>
         </p:spPr>
+        <p:txBody>
+          <a:bodyPr/>
+          <a:p/>
+        </p:txBody>
       </p:sp>
       <p:sp>
         <p:nvSpPr>
@@ -2500,6 +2476,10 @@
             <a:prstDash val="solid"/>
           </a:ln>
         </p:spPr>
+        <p:txBody>
+          <a:bodyPr/>
+          <a:p/>
+        </p:txBody>
       </p:sp>
       <p:sp>
         <p:nvSpPr>
@@ -2566,6 +2546,10 @@
             <a:prstDash val="solid"/>
           </a:ln>
         </p:spPr>
+        <p:txBody>
+          <a:bodyPr/>
+          <a:p/>
+        </p:txBody>
       </p:sp>
       <p:sp>
         <p:nvSpPr>
@@ -2632,6 +2616,10 @@
             <a:prstDash val="solid"/>
           </a:ln>
         </p:spPr>
+        <p:txBody>
+          <a:bodyPr/>
+          <a:p/>
+        </p:txBody>
       </p:sp>
       <p:sp>
         <p:nvSpPr>
@@ -2698,6 +2686,10 @@
             <a:prstDash val="solid"/>
           </a:ln>
         </p:spPr>
+        <p:txBody>
+          <a:bodyPr/>
+          <a:p/>
+        </p:txBody>
       </p:sp>
       <p:sp>
         <p:nvSpPr>
@@ -2764,6 +2756,10 @@
             <a:prstDash val="solid"/>
           </a:ln>
         </p:spPr>
+        <p:txBody>
+          <a:bodyPr/>
+          <a:p/>
+        </p:txBody>
       </p:sp>
       <p:sp>
         <p:nvSpPr>
@@ -2830,6 +2826,10 @@
             <a:prstDash val="solid"/>
           </a:ln>
         </p:spPr>
+        <p:txBody>
+          <a:bodyPr/>
+          <a:p/>
+        </p:txBody>
       </p:sp>
       <p:sp>
         <p:nvSpPr>
@@ -2896,6 +2896,10 @@
             <a:prstDash val="solid"/>
           </a:ln>
         </p:spPr>
+        <p:txBody>
+          <a:bodyPr/>
+          <a:p/>
+        </p:txBody>
       </p:sp>
       <p:sp>
         <p:nvSpPr>
@@ -2962,6 +2966,10 @@
             <a:prstDash val="solid"/>
           </a:ln>
         </p:spPr>
+        <p:txBody>
+          <a:bodyPr/>
+          <a:p/>
+        </p:txBody>
       </p:sp>
       <p:sp>
         <p:nvSpPr>
@@ -3028,6 +3036,10 @@
             <a:prstDash val="solid"/>
           </a:ln>
         </p:spPr>
+        <p:txBody>
+          <a:bodyPr/>
+          <a:p/>
+        </p:txBody>
       </p:sp>
       <p:sp>
         <p:nvSpPr>
@@ -3178,6 +3190,10 @@
             <a:prstDash val="solid"/>
           </a:ln>
         </p:spPr>
+        <p:txBody>
+          <a:bodyPr/>
+          <a:p/>
+        </p:txBody>
       </p:sp>
       <p:sp>
         <p:nvSpPr>
@@ -3608,6 +3624,10 @@
             <a:prstDash val="solid"/>
           </a:ln>
         </p:spPr>
+        <p:txBody>
+          <a:bodyPr/>
+          <a:p/>
+        </p:txBody>
       </p:sp>
       <p:sp>
         <p:nvSpPr>
@@ -3866,6 +3886,10 @@
             <a:prstDash val="solid"/>
           </a:ln>
         </p:spPr>
+        <p:txBody>
+          <a:bodyPr/>
+          <a:p/>
+        </p:txBody>
       </p:sp>
       <p:sp>
         <p:nvSpPr>
@@ -4118,6 +4142,10 @@
             <a:prstDash val="solid"/>
           </a:ln>
         </p:spPr>
+        <p:txBody>
+          <a:bodyPr/>
+          <a:p/>
+        </p:txBody>
       </p:sp>
       <p:sp>
         <p:nvSpPr>
@@ -4223,6 +4251,10 @@
             <a:prstDash val="solid"/>
           </a:ln>
         </p:spPr>
+        <p:txBody>
+          <a:bodyPr/>
+          <a:p/>
+        </p:txBody>
       </p:sp>
       <p:sp>
         <p:nvSpPr>
@@ -4369,6 +4401,10 @@
             <a:prstDash val="solid"/>
           </a:ln>
         </p:spPr>
+        <p:txBody>
+          <a:bodyPr/>
+          <a:p/>
+        </p:txBody>
       </p:sp>
       <p:sp>
         <p:nvSpPr>
@@ -4515,6 +4551,10 @@
             <a:prstDash val="solid"/>
           </a:ln>
         </p:spPr>
+        <p:txBody>
+          <a:bodyPr/>
+          <a:p/>
+        </p:txBody>
       </p:sp>
       <p:sp>
         <p:nvSpPr>
@@ -4661,6 +4701,10 @@
             <a:prstDash val="solid"/>
           </a:ln>
         </p:spPr>
+        <p:txBody>
+          <a:bodyPr/>
+          <a:p/>
+        </p:txBody>
       </p:sp>
       <p:sp>
         <p:nvSpPr>
@@ -4807,6 +4851,10 @@
             <a:prstDash val="solid"/>
           </a:ln>
         </p:spPr>
+        <p:txBody>
+          <a:bodyPr/>
+          <a:p/>
+        </p:txBody>
       </p:sp>
       <p:sp>
         <p:nvSpPr>
@@ -4992,6 +5040,10 @@
             <a:prstDash val="solid"/>
           </a:ln>
         </p:spPr>
+        <p:txBody>
+          <a:bodyPr/>
+          <a:p/>
+        </p:txBody>
       </p:sp>
       <p:sp>
         <p:nvSpPr>
@@ -5097,6 +5149,10 @@
             <a:prstDash val="solid"/>
           </a:ln>
         </p:spPr>
+        <p:txBody>
+          <a:bodyPr/>
+          <a:p/>
+        </p:txBody>
       </p:sp>
       <p:sp>
         <p:nvSpPr>
@@ -5202,6 +5258,10 @@
             <a:prstDash val="solid"/>
           </a:ln>
         </p:spPr>
+        <p:txBody>
+          <a:bodyPr/>
+          <a:p/>
+        </p:txBody>
       </p:sp>
       <p:sp>
         <p:nvSpPr>
@@ -5307,6 +5367,10 @@
             <a:prstDash val="solid"/>
           </a:ln>
         </p:spPr>
+        <p:txBody>
+          <a:bodyPr/>
+          <a:p/>
+        </p:txBody>
       </p:sp>
       <p:sp>
         <p:nvSpPr>
@@ -5412,6 +5476,10 @@
             <a:prstDash val="solid"/>
           </a:ln>
         </p:spPr>
+        <p:txBody>
+          <a:bodyPr/>
+          <a:p/>
+        </p:txBody>
       </p:sp>
       <p:sp>
         <p:nvSpPr>
@@ -5517,6 +5585,10 @@
             <a:prstDash val="solid"/>
           </a:ln>
         </p:spPr>
+        <p:txBody>
+          <a:bodyPr/>
+          <a:p/>
+        </p:txBody>
       </p:sp>
       <p:sp>
         <p:nvSpPr>
@@ -5622,6 +5694,10 @@
             <a:prstDash val="solid"/>
           </a:ln>
         </p:spPr>
+        <p:txBody>
+          <a:bodyPr/>
+          <a:p/>
+        </p:txBody>
       </p:sp>
       <p:sp>
         <p:nvSpPr>
@@ -5727,6 +5803,10 @@
             <a:prstDash val="solid"/>
           </a:ln>
         </p:spPr>
+        <p:txBody>
+          <a:bodyPr/>
+          <a:p/>
+        </p:txBody>
       </p:sp>
       <p:sp>
         <p:nvSpPr>
@@ -5832,6 +5912,10 @@
             <a:prstDash val="solid"/>
           </a:ln>
         </p:spPr>
+        <p:txBody>
+          <a:bodyPr/>
+          <a:p/>
+        </p:txBody>
       </p:sp>
       <p:sp>
         <p:nvSpPr>
@@ -5937,6 +6021,10 @@
             <a:prstDash val="solid"/>
           </a:ln>
         </p:spPr>
+        <p:txBody>
+          <a:bodyPr/>
+          <a:p/>
+        </p:txBody>
       </p:sp>
       <p:sp>
         <p:nvSpPr>
@@ -6005,6 +6093,10 @@
             <a:prstDash val="solid"/>
           </a:ln>
         </p:spPr>
+        <p:txBody>
+          <a:bodyPr/>
+          <a:p/>
+        </p:txBody>
       </p:sp>
       <p:sp>
         <p:nvSpPr>
@@ -6257,6 +6349,10 @@
             <a:prstDash val="solid"/>
           </a:ln>
         </p:spPr>
+        <p:txBody>
+          <a:bodyPr/>
+          <a:p/>
+        </p:txBody>
       </p:sp>
       <p:sp>
         <p:nvSpPr>
@@ -6401,6 +6497,10 @@
             <a:prstDash val="solid"/>
           </a:ln>
         </p:spPr>
+        <p:txBody>
+          <a:bodyPr/>
+          <a:p/>
+        </p:txBody>
       </p:sp>
       <p:sp>
         <p:nvSpPr>
@@ -6506,6 +6606,10 @@
             <a:prstDash val="solid"/>
           </a:ln>
         </p:spPr>
+        <p:txBody>
+          <a:bodyPr/>
+          <a:p/>
+        </p:txBody>
       </p:sp>
       <p:sp>
         <p:nvSpPr>
@@ -6611,6 +6715,10 @@
             <a:prstDash val="solid"/>
           </a:ln>
         </p:spPr>
+        <p:txBody>
+          <a:bodyPr/>
+          <a:p/>
+        </p:txBody>
       </p:sp>
       <p:sp>
         <p:nvSpPr>
@@ -6716,6 +6824,10 @@
             <a:prstDash val="solid"/>
           </a:ln>
         </p:spPr>
+        <p:txBody>
+          <a:bodyPr/>
+          <a:p/>
+        </p:txBody>
       </p:sp>
       <p:sp>
         <p:nvSpPr>
@@ -6821,6 +6933,10 @@
             <a:prstDash val="solid"/>
           </a:ln>
         </p:spPr>
+        <p:txBody>
+          <a:bodyPr/>
+          <a:p/>
+        </p:txBody>
       </p:sp>
       <p:sp>
         <p:nvSpPr>
@@ -6926,6 +7042,10 @@
             <a:prstDash val="solid"/>
           </a:ln>
         </p:spPr>
+        <p:txBody>
+          <a:bodyPr/>
+          <a:p/>
+        </p:txBody>
       </p:sp>
       <p:sp>
         <p:nvSpPr>
@@ -7031,6 +7151,10 @@
             <a:prstDash val="solid"/>
           </a:ln>
         </p:spPr>
+        <p:txBody>
+          <a:bodyPr/>
+          <a:p/>
+        </p:txBody>
       </p:sp>
       <p:sp>
         <p:nvSpPr>
@@ -7093,6 +7217,10 @@
             <a:prstDash val="solid"/>
           </a:ln>
         </p:spPr>
+        <p:txBody>
+          <a:bodyPr/>
+          <a:p/>
+        </p:txBody>
       </p:sp>
       <p:sp>
         <p:nvSpPr>
@@ -7159,6 +7287,10 @@
             <a:prstDash val="solid"/>
           </a:ln>
         </p:spPr>
+        <p:txBody>
+          <a:bodyPr/>
+          <a:p/>
+        </p:txBody>
       </p:sp>
       <p:sp>
         <p:nvSpPr>
@@ -7264,6 +7396,10 @@
             <a:prstDash val="solid"/>
           </a:ln>
         </p:spPr>
+        <p:txBody>
+          <a:bodyPr/>
+          <a:p/>
+        </p:txBody>
       </p:sp>
       <p:sp>
         <p:nvSpPr>
@@ -7369,6 +7505,10 @@
             <a:prstDash val="solid"/>
           </a:ln>
         </p:spPr>
+        <p:txBody>
+          <a:bodyPr/>
+          <a:p/>
+        </p:txBody>
       </p:sp>
       <p:sp>
         <p:nvSpPr>
@@ -7474,6 +7614,10 @@
             <a:prstDash val="solid"/>
           </a:ln>
         </p:spPr>
+        <p:txBody>
+          <a:bodyPr/>
+          <a:p/>
+        </p:txBody>
       </p:sp>
       <p:sp>
         <p:nvSpPr>
@@ -7579,6 +7723,10 @@
             <a:prstDash val="solid"/>
           </a:ln>
         </p:spPr>
+        <p:txBody>
+          <a:bodyPr/>
+          <a:p/>
+        </p:txBody>
       </p:sp>
       <p:sp>
         <p:nvSpPr>
@@ -7684,6 +7832,10 @@
             <a:prstDash val="solid"/>
           </a:ln>
         </p:spPr>
+        <p:txBody>
+          <a:bodyPr/>
+          <a:p/>
+        </p:txBody>
       </p:sp>
       <p:sp>
         <p:nvSpPr>
@@ -7746,6 +7898,10 @@
             <a:prstDash val="solid"/>
           </a:ln>
         </p:spPr>
+        <p:txBody>
+          <a:bodyPr/>
+          <a:p/>
+        </p:txBody>
       </p:sp>
       <p:sp>
         <p:nvSpPr>
@@ -7846,6 +8002,10 @@
             <a:prstDash val="solid"/>
           </a:ln>
         </p:spPr>
+        <p:txBody>
+          <a:bodyPr/>
+          <a:p/>
+        </p:txBody>
       </p:sp>
       <p:sp>
         <p:nvSpPr>
@@ -8098,6 +8258,10 @@
             <a:prstDash val="solid"/>
           </a:ln>
         </p:spPr>
+        <p:txBody>
+          <a:bodyPr/>
+          <a:p/>
+        </p:txBody>
       </p:sp>
       <p:sp>
         <p:nvSpPr>
@@ -8201,6 +8365,10 @@
             <a:prstDash val="solid"/>
           </a:ln>
         </p:spPr>
+        <p:txBody>
+          <a:bodyPr/>
+          <a:p/>
+        </p:txBody>
       </p:sp>
       <p:sp>
         <p:nvSpPr>
@@ -8298,6 +8466,10 @@
             <a:prstDash val="solid"/>
           </a:ln>
         </p:spPr>
+        <p:txBody>
+          <a:bodyPr/>
+          <a:p/>
+        </p:txBody>
       </p:sp>
       <p:sp>
         <p:nvSpPr>
@@ -8361,6 +8533,10 @@
             <a:prstDash val="solid"/>
           </a:ln>
         </p:spPr>
+        <p:txBody>
+          <a:bodyPr/>
+          <a:p/>
+        </p:txBody>
       </p:sp>
       <p:sp>
         <p:nvSpPr>
@@ -8424,6 +8600,10 @@
             <a:prstDash val="solid"/>
           </a:ln>
         </p:spPr>
+        <p:txBody>
+          <a:bodyPr/>
+          <a:p/>
+        </p:txBody>
       </p:sp>
       <p:sp>
         <p:nvSpPr>
@@ -8487,6 +8667,10 @@
             <a:prstDash val="solid"/>
           </a:ln>
         </p:spPr>
+        <p:txBody>
+          <a:bodyPr/>
+          <a:p/>
+        </p:txBody>
       </p:sp>
       <p:sp>
         <p:nvSpPr>
@@ -8550,6 +8734,10 @@
             <a:prstDash val="solid"/>
           </a:ln>
         </p:spPr>
+        <p:txBody>
+          <a:bodyPr/>
+          <a:p/>
+        </p:txBody>
       </p:sp>
       <p:sp>
         <p:nvSpPr>
@@ -8613,6 +8801,10 @@
             <a:prstDash val="solid"/>
           </a:ln>
         </p:spPr>
+        <p:txBody>
+          <a:bodyPr/>
+          <a:p/>
+        </p:txBody>
       </p:sp>
       <p:sp>
         <p:nvSpPr>
@@ -8676,6 +8868,10 @@
             <a:prstDash val="solid"/>
           </a:ln>
         </p:spPr>
+        <p:txBody>
+          <a:bodyPr/>
+          <a:p/>
+        </p:txBody>
       </p:sp>
       <p:sp>
         <p:nvSpPr>
@@ -8739,6 +8935,10 @@
             <a:prstDash val="solid"/>
           </a:ln>
         </p:spPr>
+        <p:txBody>
+          <a:bodyPr/>
+          <a:p/>
+        </p:txBody>
       </p:sp>
       <p:sp>
         <p:nvSpPr>
@@ -8802,6 +9002,10 @@
             <a:prstDash val="solid"/>
           </a:ln>
         </p:spPr>
+        <p:txBody>
+          <a:bodyPr/>
+          <a:p/>
+        </p:txBody>
       </p:sp>
       <p:sp>
         <p:nvSpPr>
@@ -8865,6 +9069,10 @@
             <a:prstDash val="solid"/>
           </a:ln>
         </p:spPr>
+        <p:txBody>
+          <a:bodyPr/>
+          <a:p/>
+        </p:txBody>
       </p:sp>
       <p:sp>
         <p:nvSpPr>
@@ -8928,6 +9136,10 @@
             <a:prstDash val="solid"/>
           </a:ln>
         </p:spPr>
+        <p:txBody>
+          <a:bodyPr/>
+          <a:p/>
+        </p:txBody>
       </p:sp>
       <p:sp>
         <p:nvSpPr>
@@ -8991,6 +9203,10 @@
             <a:prstDash val="solid"/>
           </a:ln>
         </p:spPr>
+        <p:txBody>
+          <a:bodyPr/>
+          <a:p/>
+        </p:txBody>
       </p:sp>
       <p:sp>
         <p:nvSpPr>
@@ -9054,6 +9270,10 @@
             <a:prstDash val="solid"/>
           </a:ln>
         </p:spPr>
+        <p:txBody>
+          <a:bodyPr/>
+          <a:p/>
+        </p:txBody>
       </p:sp>
       <p:sp>
         <p:nvSpPr>
@@ -9192,6 +9412,10 @@
             <a:prstDash val="solid"/>
           </a:ln>
         </p:spPr>
+        <p:txBody>
+          <a:bodyPr/>
+          <a:p/>
+        </p:txBody>
       </p:sp>
       <p:sp>
         <p:nvSpPr>
@@ -9444,6 +9668,10 @@
             <a:prstDash val="solid"/>
           </a:ln>
         </p:spPr>
+        <p:txBody>
+          <a:bodyPr/>
+          <a:p/>
+        </p:txBody>
       </p:sp>
       <p:sp>
         <p:nvSpPr>
@@ -9588,6 +9816,10 @@
             <a:prstDash val="solid"/>
           </a:ln>
         </p:spPr>
+        <p:txBody>
+          <a:bodyPr/>
+          <a:p/>
+        </p:txBody>
       </p:sp>
       <p:sp>
         <p:nvSpPr>
@@ -9693,6 +9925,10 @@
             <a:prstDash val="solid"/>
           </a:ln>
         </p:spPr>
+        <p:txBody>
+          <a:bodyPr/>
+          <a:p/>
+        </p:txBody>
       </p:sp>
       <p:sp>
         <p:nvSpPr>
@@ -9798,6 +10034,10 @@
             <a:prstDash val="solid"/>
           </a:ln>
         </p:spPr>
+        <p:txBody>
+          <a:bodyPr/>
+          <a:p/>
+        </p:txBody>
       </p:sp>
       <p:sp>
         <p:nvSpPr>
@@ -9903,6 +10143,10 @@
             <a:prstDash val="solid"/>
           </a:ln>
         </p:spPr>
+        <p:txBody>
+          <a:bodyPr/>
+          <a:p/>
+        </p:txBody>
       </p:sp>
       <p:sp>
         <p:nvSpPr>
@@ -10008,6 +10252,10 @@
             <a:prstDash val="solid"/>
           </a:ln>
         </p:spPr>
+        <p:txBody>
+          <a:bodyPr/>
+          <a:p/>
+        </p:txBody>
       </p:sp>
       <p:sp>
         <p:nvSpPr>
@@ -10113,6 +10361,10 @@
             <a:prstDash val="solid"/>
           </a:ln>
         </p:spPr>
+        <p:txBody>
+          <a:bodyPr/>
+          <a:p/>
+        </p:txBody>
       </p:sp>
       <p:sp>
         <p:nvSpPr>
@@ -10218,6 +10470,10 @@
             <a:prstDash val="solid"/>
           </a:ln>
         </p:spPr>
+        <p:txBody>
+          <a:bodyPr/>
+          <a:p/>
+        </p:txBody>
       </p:sp>
       <p:sp>
         <p:nvSpPr>
@@ -10323,6 +10579,10 @@
             <a:prstDash val="solid"/>
           </a:ln>
         </p:spPr>
+        <p:txBody>
+          <a:bodyPr/>
+          <a:p/>
+        </p:txBody>
       </p:sp>
       <p:sp>
         <p:nvSpPr>
@@ -10471,6 +10731,10 @@
             <a:prstDash val="solid"/>
           </a:ln>
         </p:spPr>
+        <p:txBody>
+          <a:bodyPr/>
+          <a:p/>
+        </p:txBody>
       </p:sp>
       <p:sp>
         <p:nvSpPr>
@@ -10723,6 +10987,10 @@
             <a:prstDash val="solid"/>
           </a:ln>
         </p:spPr>
+        <p:txBody>
+          <a:bodyPr/>
+          <a:p/>
+        </p:txBody>
       </p:sp>
       <p:sp>
         <p:nvSpPr>
@@ -10826,6 +11094,10 @@
             <a:prstDash val="solid"/>
           </a:ln>
         </p:spPr>
+        <p:txBody>
+          <a:bodyPr/>
+          <a:p/>
+        </p:txBody>
       </p:sp>
       <p:sp>
         <p:nvSpPr>
@@ -10892,6 +11164,10 @@
             <a:prstDash val="solid"/>
           </a:ln>
         </p:spPr>
+        <p:txBody>
+          <a:bodyPr/>
+          <a:p/>
+        </p:txBody>
       </p:sp>
       <p:sp>
         <p:nvSpPr>
@@ -10958,6 +11234,10 @@
             <a:prstDash val="solid"/>
           </a:ln>
         </p:spPr>
+        <p:txBody>
+          <a:bodyPr/>
+          <a:p/>
+        </p:txBody>
       </p:sp>
       <p:sp>
         <p:nvSpPr>
@@ -11024,6 +11304,10 @@
             <a:prstDash val="solid"/>
           </a:ln>
         </p:spPr>
+        <p:txBody>
+          <a:bodyPr/>
+          <a:p/>
+        </p:txBody>
       </p:sp>
       <p:sp>
         <p:nvSpPr>
@@ -11090,6 +11374,10 @@
             <a:prstDash val="solid"/>
           </a:ln>
         </p:spPr>
+        <p:txBody>
+          <a:bodyPr/>
+          <a:p/>
+        </p:txBody>
       </p:sp>
       <p:sp>
         <p:nvSpPr>
@@ -11156,6 +11444,10 @@
             <a:prstDash val="solid"/>
           </a:ln>
         </p:spPr>
+        <p:txBody>
+          <a:bodyPr/>
+          <a:p/>
+        </p:txBody>
       </p:sp>
       <p:sp>
         <p:nvSpPr>
@@ -11222,6 +11514,10 @@
             <a:prstDash val="solid"/>
           </a:ln>
         </p:spPr>
+        <p:txBody>
+          <a:bodyPr/>
+          <a:p/>
+        </p:txBody>
       </p:sp>
       <p:sp>
         <p:nvSpPr>
@@ -11288,6 +11584,10 @@
             <a:prstDash val="solid"/>
           </a:ln>
         </p:spPr>
+        <p:txBody>
+          <a:bodyPr/>
+          <a:p/>
+        </p:txBody>
       </p:sp>
       <p:sp>
         <p:nvSpPr>
@@ -11354,6 +11654,10 @@
             <a:prstDash val="solid"/>
           </a:ln>
         </p:spPr>
+        <p:txBody>
+          <a:bodyPr/>
+          <a:p/>
+        </p:txBody>
       </p:sp>
       <p:sp>
         <p:nvSpPr>
@@ -11420,6 +11724,10 @@
             <a:prstDash val="solid"/>
           </a:ln>
         </p:spPr>
+        <p:txBody>
+          <a:bodyPr/>
+          <a:p/>
+        </p:txBody>
       </p:sp>
       <p:sp>
         <p:nvSpPr>
@@ -11486,6 +11794,10 @@
             <a:prstDash val="solid"/>
           </a:ln>
         </p:spPr>
+        <p:txBody>
+          <a:bodyPr/>
+          <a:p/>
+        </p:txBody>
       </p:sp>
       <p:sp>
         <p:nvSpPr>
@@ -11552,6 +11864,10 @@
             <a:prstDash val="solid"/>
           </a:ln>
         </p:spPr>
+        <p:txBody>
+          <a:bodyPr/>
+          <a:p/>
+        </p:txBody>
       </p:sp>
       <p:sp>
         <p:nvSpPr>
@@ -11773,6 +12089,10 @@
             <a:prstDash val="solid"/>
           </a:ln>
         </p:spPr>
+        <p:txBody>
+          <a:bodyPr/>
+          <a:p/>
+        </p:txBody>
       </p:sp>
       <p:sp>
         <p:nvSpPr>
@@ -12025,6 +12345,10 @@
             <a:prstDash val="solid"/>
           </a:ln>
         </p:spPr>
+        <p:txBody>
+          <a:bodyPr/>
+          <a:p/>
+        </p:txBody>
       </p:sp>
       <p:sp>
         <p:nvSpPr>
@@ -12283,6 +12607,10 @@
             <a:prstDash val="solid"/>
           </a:ln>
         </p:spPr>
+        <p:txBody>
+          <a:bodyPr/>
+          <a:p/>
+        </p:txBody>
       </p:sp>
       <p:sp>
         <p:nvSpPr>
@@ -12535,6 +12863,10 @@
             <a:prstDash val="solid"/>
           </a:ln>
         </p:spPr>
+        <p:txBody>
+          <a:bodyPr/>
+          <a:p/>
+        </p:txBody>
       </p:sp>
       <p:sp>
         <p:nvSpPr>
@@ -12793,6 +13125,10 @@
             <a:prstDash val="solid"/>
           </a:ln>
         </p:spPr>
+        <p:txBody>
+          <a:bodyPr/>
+          <a:p/>
+        </p:txBody>
       </p:sp>
       <p:sp>
         <p:nvSpPr>
